--- a/MRP_Final_Presentation_Slide_Final.pptx
+++ b/MRP_Final_Presentation_Slide_Final.pptx
@@ -7376,22 +7376,55 @@
               <a:defRPr sz="1800"/>
             </a:pPr>
             <a:r>
+              <a:rPr lang="en-US" sz="1700" dirty="0">
+                <a:hlinkClick r:id="rId2"/>
+              </a:rPr>
+              <a:t>https://youtu.be/hoMQMG_n_yI</a:t>
+            </a:r>
+            <a:endParaRPr lang="en-US" sz="1700" dirty="0"/>
+          </a:p>
+          <a:p>
+            <a:pPr>
+              <a:defRPr sz="1800"/>
+            </a:pPr>
+            <a:endParaRPr lang="en-US" sz="1700" dirty="0"/>
+          </a:p>
+          <a:p>
+            <a:pPr marL="0" indent="0">
+              <a:buNone/>
+              <a:defRPr sz="1800"/>
+            </a:pPr>
+            <a:r>
               <a:rPr lang="en-US" sz="1700" dirty="0"/>
-              <a:t>https://</a:t>
-            </a:r>
-            <a:r>
-              <a:rPr lang="en-US" sz="1700" dirty="0" err="1"/>
-              <a:t>youtu.be</a:t>
-            </a:r>
+              <a:t>Future Plan:</a:t>
+            </a:r>
+          </a:p>
+          <a:p>
+            <a:pPr>
+              <a:defRPr sz="1800"/>
+            </a:pPr>
             <a:r>
               <a:rPr lang="en-US" sz="1700" dirty="0"/>
-              <a:t>/</a:t>
-            </a:r>
-            <a:r>
-              <a:rPr lang="en-US" sz="1700" dirty="0" err="1"/>
-              <a:t>hoMQMG_n_yI</a:t>
-            </a:r>
-            <a:endParaRPr lang="en-US" sz="1700" dirty="0"/>
+              <a:t>Implement Transfer Learning</a:t>
+            </a:r>
+          </a:p>
+          <a:p>
+            <a:pPr lvl="1">
+              <a:defRPr sz="1800"/>
+            </a:pPr>
+            <a:r>
+              <a:rPr lang="en-US" sz="1300" dirty="0"/>
+              <a:t>Take a model pre-trained on a massive dataset (like ImageNet) and 'fine-tune' it for X-ray detection. </a:t>
+            </a:r>
+          </a:p>
+          <a:p>
+            <a:pPr lvl="1">
+              <a:defRPr sz="1800"/>
+            </a:pPr>
+            <a:r>
+              <a:rPr lang="en-US" sz="1300" dirty="0"/>
+              <a:t> Give the model a 'head start' by letting it use pre-learned knowledge of complex shapes, which is much more effective than training from scratch on a small dataset.</a:t>
+            </a:r>
           </a:p>
           <a:p>
             <a:pPr marL="0" indent="0">
@@ -9514,13 +9547,13 @@
         </p:nvSpPr>
         <p:spPr>
           <a:xfrm>
-            <a:off x="3607694" y="649480"/>
-            <a:ext cx="4916510" cy="5546047"/>
+            <a:off x="3673808" y="106962"/>
+            <a:ext cx="4901480" cy="6858001"/>
           </a:xfrm>
         </p:spPr>
         <p:txBody>
           <a:bodyPr anchor="ctr">
-            <a:normAutofit/>
+            <a:normAutofit lnSpcReduction="10000"/>
           </a:bodyPr>
           <a:lstStyle/>
           <a:p>
@@ -9562,7 +9595,15 @@
           <a:p>
             <a:r>
               <a:rPr lang="en-US" sz="1800" dirty="0"/>
-              <a:t>Apply CNN convolution layer </a:t>
+              <a:t>Apply CNN convolution layer: 1st extracts low-level image features, 2</a:t>
+            </a:r>
+            <a:r>
+              <a:rPr lang="en-US" sz="1800" baseline="30000" dirty="0"/>
+              <a:t>nd</a:t>
+            </a:r>
+            <a:r>
+              <a:rPr lang="en-US" sz="1800" dirty="0"/>
+              <a:t> learns more complex patterns before classification.</a:t>
             </a:r>
           </a:p>
           <a:p>
@@ -9576,7 +9617,7 @@
             </a:r>
             <a:r>
               <a:rPr lang="en-US" sz="1800" dirty="0"/>
-              <a:t> activation </a:t>
+              <a:t> activation: reduces vanishing gradients and makes deep networks train faster.</a:t>
             </a:r>
           </a:p>
           <a:p>
@@ -9602,46 +9643,9 @@
               <a:rPr lang="en-US" sz="1800" dirty="0"/>
               <a:t>Tools: </a:t>
             </a:r>
-          </a:p>
-          <a:p>
-            <a:pPr lvl="1"/>
-            <a:r>
-              <a:rPr lang="en-US" sz="1800" dirty="0"/>
-              <a:t>Python: https://</a:t>
-            </a:r>
-            <a:r>
-              <a:rPr lang="en-US" sz="1800" dirty="0" err="1"/>
-              <a:t>www.python.org</a:t>
-            </a:r>
-            <a:r>
-              <a:rPr lang="en-US" sz="1800" dirty="0"/>
-              <a:t>/</a:t>
-            </a:r>
-          </a:p>
-          <a:p>
-            <a:pPr lvl="1"/>
             <a:r>
               <a:rPr lang="en-US" sz="1800" dirty="0" err="1"/>
               <a:t>PyTorch</a:t>
-            </a:r>
-            <a:r>
-              <a:rPr lang="en-US" sz="1800" dirty="0"/>
-              <a:t>: https://</a:t>
-            </a:r>
-            <a:r>
-              <a:rPr lang="en-US" sz="1800" dirty="0" err="1"/>
-              <a:t>pytorch.org</a:t>
-            </a:r>
-            <a:r>
-              <a:rPr lang="en-US" sz="1800" dirty="0"/>
-              <a:t>/</a:t>
-            </a:r>
-          </a:p>
-          <a:p>
-            <a:pPr lvl="1"/>
-            <a:r>
-              <a:rPr lang="en-US" sz="1800" dirty="0" err="1"/>
-              <a:t>TorchVision</a:t>
             </a:r>
             <a:r>
               <a:rPr lang="en-US" sz="1800" dirty="0"/>
@@ -9651,15 +9655,29 @@
               <a:rPr lang="en-US" sz="1800" dirty="0">
                 <a:hlinkClick r:id="rId2"/>
               </a:rPr>
+              <a:t>https://pytorch.org/</a:t>
+            </a:r>
+            <a:r>
+              <a:rPr lang="en-US" sz="1800" dirty="0"/>
+              <a:t>, </a:t>
+            </a:r>
+            <a:r>
+              <a:rPr lang="en-US" sz="1800" dirty="0" err="1"/>
+              <a:t>TorchVision</a:t>
+            </a:r>
+            <a:r>
+              <a:rPr lang="en-US" sz="1800" dirty="0"/>
+              <a:t>: </a:t>
+            </a:r>
+            <a:r>
+              <a:rPr lang="en-US" sz="1800" dirty="0">
+                <a:hlinkClick r:id="rId3"/>
+              </a:rPr>
               <a:t>https://docs.pytorch.org/vision/stable/index.html</a:t>
             </a:r>
-            <a:endParaRPr lang="en-US" sz="1800" dirty="0"/>
-          </a:p>
-          <a:p>
-            <a:pPr lvl="1"/>
             <a:r>
               <a:rPr lang="en-US" sz="1800" dirty="0"/>
-              <a:t>Matplotlib: https://</a:t>
+              <a:t>, Matplotlib: https://</a:t>
             </a:r>
             <a:r>
               <a:rPr lang="en-US" sz="1800" dirty="0" err="1"/>
@@ -9673,7 +9691,21 @@
           <a:p>
             <a:r>
               <a:rPr lang="en-US" sz="1800" dirty="0"/>
-              <a:t>Training: Cross Entropy Loss/ Adam Optimizer</a:t>
+              <a:t>Training: </a:t>
+            </a:r>
+          </a:p>
+          <a:p>
+            <a:pPr lvl="1"/>
+            <a:r>
+              <a:rPr lang="en-US" sz="1400" dirty="0"/>
+              <a:t>Cross Entropy Loss: for binary classification task. It compares the predicted class probabilities with the true labels and guides the CNN to reduce classification errors</a:t>
+            </a:r>
+          </a:p>
+          <a:p>
+            <a:pPr lvl="1"/>
+            <a:r>
+              <a:rPr lang="en-US" sz="1400" dirty="0"/>
+              <a:t>Adam Optimizer: automatically adjusts the learning rate for each parameter, which is very helpful when the training data is noisy or the architecture is simple</a:t>
             </a:r>
           </a:p>
           <a:p>
@@ -10001,7 +10033,7 @@
           <a:p>
             <a:r>
               <a:rPr lang="en-US" dirty="0"/>
-              <a:t>The CNN model was evaluated on unseen test images and achieved a final test accuracy of </a:t>
+              <a:t>CNN model was evaluated on unseen test images and achieved a final test accuracy of </a:t>
             </a:r>
             <a:r>
               <a:rPr lang="en-US" b="1" dirty="0"/>
